--- a/ECE1390_Lecture5.pptx
+++ b/ECE1390_Lecture5.pptx
@@ -213,7 +213,7 @@
           <a:p>
             <a:fld id="{398BE373-D928-BE43-AD92-B833D6227BF5}" type="datetimeFigureOut">
               <a:rPr lang="en-US" smtClean="0"/>
-              <a:t>8/25/24</a:t>
+              <a:t>9/11/24</a:t>
             </a:fld>
             <a:endParaRPr lang="en-US"/>
           </a:p>
@@ -795,7 +795,7 @@
           <a:p>
             <a:fld id="{13E9B49C-C8FD-4344-8CD3-ED4C91409D68}" type="datetimeFigureOut">
               <a:rPr lang="en-US" smtClean="0"/>
-              <a:t>8/25/24</a:t>
+              <a:t>9/11/24</a:t>
             </a:fld>
             <a:endParaRPr lang="en-US"/>
           </a:p>
@@ -993,7 +993,7 @@
           <a:p>
             <a:fld id="{13E9B49C-C8FD-4344-8CD3-ED4C91409D68}" type="datetimeFigureOut">
               <a:rPr lang="en-US" smtClean="0"/>
-              <a:t>8/25/24</a:t>
+              <a:t>9/11/24</a:t>
             </a:fld>
             <a:endParaRPr lang="en-US"/>
           </a:p>
@@ -1201,7 +1201,7 @@
           <a:p>
             <a:fld id="{13E9B49C-C8FD-4344-8CD3-ED4C91409D68}" type="datetimeFigureOut">
               <a:rPr lang="en-US" smtClean="0"/>
-              <a:t>8/25/24</a:t>
+              <a:t>9/11/24</a:t>
             </a:fld>
             <a:endParaRPr lang="en-US"/>
           </a:p>
@@ -1399,7 +1399,7 @@
           <a:p>
             <a:fld id="{13E9B49C-C8FD-4344-8CD3-ED4C91409D68}" type="datetimeFigureOut">
               <a:rPr lang="en-US" smtClean="0"/>
-              <a:t>8/25/24</a:t>
+              <a:t>9/11/24</a:t>
             </a:fld>
             <a:endParaRPr lang="en-US"/>
           </a:p>
@@ -1674,7 +1674,7 @@
           <a:p>
             <a:fld id="{13E9B49C-C8FD-4344-8CD3-ED4C91409D68}" type="datetimeFigureOut">
               <a:rPr lang="en-US" smtClean="0"/>
-              <a:t>8/25/24</a:t>
+              <a:t>9/11/24</a:t>
             </a:fld>
             <a:endParaRPr lang="en-US"/>
           </a:p>
@@ -1939,7 +1939,7 @@
           <a:p>
             <a:fld id="{13E9B49C-C8FD-4344-8CD3-ED4C91409D68}" type="datetimeFigureOut">
               <a:rPr lang="en-US" smtClean="0"/>
-              <a:t>8/25/24</a:t>
+              <a:t>9/11/24</a:t>
             </a:fld>
             <a:endParaRPr lang="en-US"/>
           </a:p>
@@ -2351,7 +2351,7 @@
           <a:p>
             <a:fld id="{13E9B49C-C8FD-4344-8CD3-ED4C91409D68}" type="datetimeFigureOut">
               <a:rPr lang="en-US" smtClean="0"/>
-              <a:t>8/25/24</a:t>
+              <a:t>9/11/24</a:t>
             </a:fld>
             <a:endParaRPr lang="en-US"/>
           </a:p>
@@ -2492,7 +2492,7 @@
           <a:p>
             <a:fld id="{13E9B49C-C8FD-4344-8CD3-ED4C91409D68}" type="datetimeFigureOut">
               <a:rPr lang="en-US" smtClean="0"/>
-              <a:t>8/25/24</a:t>
+              <a:t>9/11/24</a:t>
             </a:fld>
             <a:endParaRPr lang="en-US"/>
           </a:p>
@@ -2605,7 +2605,7 @@
           <a:p>
             <a:fld id="{13E9B49C-C8FD-4344-8CD3-ED4C91409D68}" type="datetimeFigureOut">
               <a:rPr lang="en-US" smtClean="0"/>
-              <a:t>8/25/24</a:t>
+              <a:t>9/11/24</a:t>
             </a:fld>
             <a:endParaRPr lang="en-US"/>
           </a:p>
@@ -2916,7 +2916,7 @@
           <a:p>
             <a:fld id="{13E9B49C-C8FD-4344-8CD3-ED4C91409D68}" type="datetimeFigureOut">
               <a:rPr lang="en-US" smtClean="0"/>
-              <a:t>8/25/24</a:t>
+              <a:t>9/11/24</a:t>
             </a:fld>
             <a:endParaRPr lang="en-US"/>
           </a:p>
@@ -3204,7 +3204,7 @@
           <a:p>
             <a:fld id="{13E9B49C-C8FD-4344-8CD3-ED4C91409D68}" type="datetimeFigureOut">
               <a:rPr lang="en-US" smtClean="0"/>
-              <a:t>8/25/24</a:t>
+              <a:t>9/11/24</a:t>
             </a:fld>
             <a:endParaRPr lang="en-US"/>
           </a:p>
@@ -3445,7 +3445,7 @@
           <a:p>
             <a:fld id="{13E9B49C-C8FD-4344-8CD3-ED4C91409D68}" type="datetimeFigureOut">
               <a:rPr lang="en-US" smtClean="0"/>
-              <a:t>8/25/24</a:t>
+              <a:t>9/11/24</a:t>
             </a:fld>
             <a:endParaRPr lang="en-US"/>
           </a:p>
@@ -6509,8 +6509,8 @@
           </a:p>
         </p:txBody>
       </p:sp>
-      <mc:AlternateContent xmlns:mc="http://schemas.openxmlformats.org/markup-compatibility/2006">
-        <mc:Choice xmlns:a14="http://schemas.microsoft.com/office/drawing/2010/main" Requires="a14">
+      <mc:AlternateContent xmlns:mc="http://schemas.openxmlformats.org/markup-compatibility/2006" xmlns:a14="http://schemas.microsoft.com/office/drawing/2010/main">
+        <mc:Choice Requires="a14">
           <p:sp>
             <p:nvSpPr>
               <p:cNvPr id="6" name="TextBox 5">
@@ -6633,7 +6633,7 @@
             </p:txBody>
           </p:sp>
         </mc:Choice>
-        <mc:Fallback>
+        <mc:Fallback xmlns="">
           <p:sp>
             <p:nvSpPr>
               <p:cNvPr id="6" name="TextBox 5">
@@ -6752,8 +6752,8 @@
           </a:fontRef>
         </p:style>
       </p:cxnSp>
-      <mc:AlternateContent xmlns:mc="http://schemas.openxmlformats.org/markup-compatibility/2006">
-        <mc:Choice xmlns:a14="http://schemas.microsoft.com/office/drawing/2010/main" Requires="a14">
+      <mc:AlternateContent xmlns:mc="http://schemas.openxmlformats.org/markup-compatibility/2006" xmlns:a14="http://schemas.microsoft.com/office/drawing/2010/main">
+        <mc:Choice Requires="a14">
           <p:sp>
             <p:nvSpPr>
               <p:cNvPr id="13" name="TextBox 12">
@@ -6839,7 +6839,7 @@
             </p:txBody>
           </p:sp>
         </mc:Choice>
-        <mc:Fallback>
+        <mc:Fallback xmlns="">
           <p:sp>
             <p:nvSpPr>
               <p:cNvPr id="13" name="TextBox 12">
@@ -6884,8 +6884,8 @@
           </p:sp>
         </mc:Fallback>
       </mc:AlternateContent>
-      <mc:AlternateContent xmlns:mc="http://schemas.openxmlformats.org/markup-compatibility/2006">
-        <mc:Choice xmlns:a14="http://schemas.microsoft.com/office/drawing/2010/main" Requires="a14">
+      <mc:AlternateContent xmlns:mc="http://schemas.openxmlformats.org/markup-compatibility/2006" xmlns:a14="http://schemas.microsoft.com/office/drawing/2010/main">
+        <mc:Choice Requires="a14">
           <p:sp>
             <p:nvSpPr>
               <p:cNvPr id="5" name="TextBox 4">
@@ -6971,7 +6971,7 @@
             </p:txBody>
           </p:sp>
         </mc:Choice>
-        <mc:Fallback>
+        <mc:Fallback xmlns="">
           <p:sp>
             <p:nvSpPr>
               <p:cNvPr id="5" name="TextBox 4">
@@ -7054,8 +7054,8 @@
           </a:fontRef>
         </p:style>
       </p:cxnSp>
-      <mc:AlternateContent xmlns:mc="http://schemas.openxmlformats.org/markup-compatibility/2006">
-        <mc:Choice xmlns:a14="http://schemas.microsoft.com/office/drawing/2010/main" Requires="a14">
+      <mc:AlternateContent xmlns:mc="http://schemas.openxmlformats.org/markup-compatibility/2006" xmlns:a14="http://schemas.microsoft.com/office/drawing/2010/main">
+        <mc:Choice Requires="a14">
           <p:sp>
             <p:nvSpPr>
               <p:cNvPr id="23" name="TextBox 22">
@@ -7123,7 +7123,7 @@
             </p:txBody>
           </p:sp>
         </mc:Choice>
-        <mc:Fallback>
+        <mc:Fallback xmlns="">
           <p:sp>
             <p:nvSpPr>
               <p:cNvPr id="23" name="TextBox 22">
@@ -7245,8 +7245,8 @@
           </a:prstGeom>
         </p:spPr>
       </p:pic>
-      <mc:AlternateContent xmlns:mc="http://schemas.openxmlformats.org/markup-compatibility/2006">
-        <mc:Choice xmlns:a14="http://schemas.microsoft.com/office/drawing/2010/main" Requires="a14">
+      <mc:AlternateContent xmlns:mc="http://schemas.openxmlformats.org/markup-compatibility/2006" xmlns:a14="http://schemas.microsoft.com/office/drawing/2010/main">
+        <mc:Choice Requires="a14">
           <p:sp>
             <p:nvSpPr>
               <p:cNvPr id="3" name="TextBox 2">
@@ -7355,7 +7355,7 @@
             </p:txBody>
           </p:sp>
         </mc:Choice>
-        <mc:Fallback>
+        <mc:Fallback xmlns="">
           <p:sp>
             <p:nvSpPr>
               <p:cNvPr id="3" name="TextBox 2">
@@ -7400,8 +7400,8 @@
           </p:sp>
         </mc:Fallback>
       </mc:AlternateContent>
-      <mc:AlternateContent xmlns:mc="http://schemas.openxmlformats.org/markup-compatibility/2006">
-        <mc:Choice xmlns:a14="http://schemas.microsoft.com/office/drawing/2010/main" Requires="a14">
+      <mc:AlternateContent xmlns:mc="http://schemas.openxmlformats.org/markup-compatibility/2006" xmlns:a14="http://schemas.microsoft.com/office/drawing/2010/main">
+        <mc:Choice Requires="a14">
           <p:sp>
             <p:nvSpPr>
               <p:cNvPr id="10" name="TextBox 9">
@@ -7487,7 +7487,7 @@
             </p:txBody>
           </p:sp>
         </mc:Choice>
-        <mc:Fallback>
+        <mc:Fallback xmlns="">
           <p:sp>
             <p:nvSpPr>
               <p:cNvPr id="10" name="TextBox 9">
@@ -10458,8 +10458,8 @@
           </a:p>
         </p:txBody>
       </p:sp>
-      <mc:AlternateContent xmlns:mc="http://schemas.openxmlformats.org/markup-compatibility/2006">
-        <mc:Choice xmlns:a14="http://schemas.microsoft.com/office/drawing/2010/main" Requires="a14">
+      <mc:AlternateContent xmlns:mc="http://schemas.openxmlformats.org/markup-compatibility/2006" xmlns:a14="http://schemas.microsoft.com/office/drawing/2010/main">
+        <mc:Choice Requires="a14">
           <p:sp>
             <p:nvSpPr>
               <p:cNvPr id="32" name="TextBox 31">
@@ -10600,7 +10600,7 @@
             </p:txBody>
           </p:sp>
         </mc:Choice>
-        <mc:Fallback>
+        <mc:Fallback xmlns="">
           <p:sp>
             <p:nvSpPr>
               <p:cNvPr id="32" name="TextBox 31">
@@ -10645,8 +10645,8 @@
           </p:sp>
         </mc:Fallback>
       </mc:AlternateContent>
-      <mc:AlternateContent xmlns:mc="http://schemas.openxmlformats.org/markup-compatibility/2006">
-        <mc:Choice xmlns:a14="http://schemas.microsoft.com/office/drawing/2010/main" Requires="a14">
+      <mc:AlternateContent xmlns:mc="http://schemas.openxmlformats.org/markup-compatibility/2006" xmlns:a14="http://schemas.microsoft.com/office/drawing/2010/main">
+        <mc:Choice Requires="a14">
           <p:sp>
             <p:nvSpPr>
               <p:cNvPr id="33" name="TextBox 32">
@@ -10880,7 +10880,7 @@
             </p:txBody>
           </p:sp>
         </mc:Choice>
-        <mc:Fallback>
+        <mc:Fallback xmlns="">
           <p:sp>
             <p:nvSpPr>
               <p:cNvPr id="33" name="TextBox 32">
@@ -10925,8 +10925,8 @@
           </p:sp>
         </mc:Fallback>
       </mc:AlternateContent>
-      <mc:AlternateContent xmlns:mc="http://schemas.openxmlformats.org/markup-compatibility/2006">
-        <mc:Choice xmlns:a14="http://schemas.microsoft.com/office/drawing/2010/main" Requires="a14">
+      <mc:AlternateContent xmlns:mc="http://schemas.openxmlformats.org/markup-compatibility/2006" xmlns:a14="http://schemas.microsoft.com/office/drawing/2010/main">
+        <mc:Choice Requires="a14">
           <p:sp>
             <p:nvSpPr>
               <p:cNvPr id="34" name="TextBox 33">
@@ -11160,7 +11160,7 @@
             </p:txBody>
           </p:sp>
         </mc:Choice>
-        <mc:Fallback>
+        <mc:Fallback xmlns="">
           <p:sp>
             <p:nvSpPr>
               <p:cNvPr id="34" name="TextBox 33">
@@ -11205,8 +11205,8 @@
           </p:sp>
         </mc:Fallback>
       </mc:AlternateContent>
-      <mc:AlternateContent xmlns:mc="http://schemas.openxmlformats.org/markup-compatibility/2006">
-        <mc:Choice xmlns:a14="http://schemas.microsoft.com/office/drawing/2010/main" Requires="a14">
+      <mc:AlternateContent xmlns:mc="http://schemas.openxmlformats.org/markup-compatibility/2006" xmlns:a14="http://schemas.microsoft.com/office/drawing/2010/main">
+        <mc:Choice Requires="a14">
           <p:sp>
             <p:nvSpPr>
               <p:cNvPr id="36" name="TextBox 35">
@@ -11340,7 +11340,7 @@
             </p:txBody>
           </p:sp>
         </mc:Choice>
-        <mc:Fallback>
+        <mc:Fallback xmlns="">
           <p:sp>
             <p:nvSpPr>
               <p:cNvPr id="36" name="TextBox 35">
@@ -11385,8 +11385,8 @@
           </p:sp>
         </mc:Fallback>
       </mc:AlternateContent>
-      <mc:AlternateContent xmlns:mc="http://schemas.openxmlformats.org/markup-compatibility/2006">
-        <mc:Choice xmlns:a14="http://schemas.microsoft.com/office/drawing/2010/main" Requires="a14">
+      <mc:AlternateContent xmlns:mc="http://schemas.openxmlformats.org/markup-compatibility/2006" xmlns:a14="http://schemas.microsoft.com/office/drawing/2010/main">
+        <mc:Choice Requires="a14">
           <p:sp>
             <p:nvSpPr>
               <p:cNvPr id="37" name="TextBox 36">
@@ -11541,7 +11541,7 @@
             </p:txBody>
           </p:sp>
         </mc:Choice>
-        <mc:Fallback>
+        <mc:Fallback xmlns="">
           <p:sp>
             <p:nvSpPr>
               <p:cNvPr id="37" name="TextBox 36">
@@ -11586,8 +11586,8 @@
           </p:sp>
         </mc:Fallback>
       </mc:AlternateContent>
-      <mc:AlternateContent xmlns:mc="http://schemas.openxmlformats.org/markup-compatibility/2006">
-        <mc:Choice xmlns:a14="http://schemas.microsoft.com/office/drawing/2010/main" Requires="a14">
+      <mc:AlternateContent xmlns:mc="http://schemas.openxmlformats.org/markup-compatibility/2006" xmlns:a14="http://schemas.microsoft.com/office/drawing/2010/main">
+        <mc:Choice Requires="a14">
           <p:sp>
             <p:nvSpPr>
               <p:cNvPr id="38" name="TextBox 37">
@@ -11742,7 +11742,7 @@
             </p:txBody>
           </p:sp>
         </mc:Choice>
-        <mc:Fallback>
+        <mc:Fallback xmlns="">
           <p:sp>
             <p:nvSpPr>
               <p:cNvPr id="38" name="TextBox 37">
@@ -11787,8 +11787,8 @@
           </p:sp>
         </mc:Fallback>
       </mc:AlternateContent>
-      <mc:AlternateContent xmlns:mc="http://schemas.openxmlformats.org/markup-compatibility/2006">
-        <mc:Choice xmlns:a14="http://schemas.microsoft.com/office/drawing/2010/main" Requires="a14">
+      <mc:AlternateContent xmlns:mc="http://schemas.openxmlformats.org/markup-compatibility/2006" xmlns:a14="http://schemas.microsoft.com/office/drawing/2010/main">
+        <mc:Choice Requires="a14">
           <p:sp>
             <p:nvSpPr>
               <p:cNvPr id="39" name="TextBox 38">
@@ -11978,7 +11978,7 @@
             </p:txBody>
           </p:sp>
         </mc:Choice>
-        <mc:Fallback>
+        <mc:Fallback xmlns="">
           <p:sp>
             <p:nvSpPr>
               <p:cNvPr id="39" name="TextBox 38">
@@ -12023,8 +12023,8 @@
           </p:sp>
         </mc:Fallback>
       </mc:AlternateContent>
-      <mc:AlternateContent xmlns:mc="http://schemas.openxmlformats.org/markup-compatibility/2006">
-        <mc:Choice xmlns:a14="http://schemas.microsoft.com/office/drawing/2010/main" Requires="a14">
+      <mc:AlternateContent xmlns:mc="http://schemas.openxmlformats.org/markup-compatibility/2006" xmlns:a14="http://schemas.microsoft.com/office/drawing/2010/main">
+        <mc:Choice Requires="a14">
           <p:sp>
             <p:nvSpPr>
               <p:cNvPr id="40" name="TextBox 39">
@@ -12214,7 +12214,7 @@
             </p:txBody>
           </p:sp>
         </mc:Choice>
-        <mc:Fallback>
+        <mc:Fallback xmlns="">
           <p:sp>
             <p:nvSpPr>
               <p:cNvPr id="40" name="TextBox 39">
@@ -14379,8 +14379,8 @@
           </a:prstGeom>
         </p:spPr>
       </p:pic>
-      <mc:AlternateContent xmlns:mc="http://schemas.openxmlformats.org/markup-compatibility/2006">
-        <mc:Choice xmlns:a14="http://schemas.microsoft.com/office/drawing/2010/main" Requires="a14">
+      <mc:AlternateContent xmlns:mc="http://schemas.openxmlformats.org/markup-compatibility/2006" xmlns:a14="http://schemas.microsoft.com/office/drawing/2010/main">
+        <mc:Choice Requires="a14">
           <p:sp>
             <p:nvSpPr>
               <p:cNvPr id="3" name="TextBox 2">
@@ -14409,6 +14409,7 @@
               </a:bodyPr>
               <a:lstStyle/>
               <a:p>
+                <a:pPr/>
                 <a14:m>
                   <m:oMathPara xmlns:m="http://schemas.openxmlformats.org/officeDocument/2006/math">
                     <m:oMathParaPr>
@@ -14550,7 +14551,7 @@
             </p:txBody>
           </p:sp>
         </mc:Choice>
-        <mc:Fallback>
+        <mc:Fallback xmlns="">
           <p:sp>
             <p:nvSpPr>
               <p:cNvPr id="3" name="TextBox 2">
@@ -14595,8 +14596,8 @@
           </p:sp>
         </mc:Fallback>
       </mc:AlternateContent>
-      <mc:AlternateContent xmlns:mc="http://schemas.openxmlformats.org/markup-compatibility/2006">
-        <mc:Choice xmlns:a14="http://schemas.microsoft.com/office/drawing/2010/main" Requires="a14">
+      <mc:AlternateContent xmlns:mc="http://schemas.openxmlformats.org/markup-compatibility/2006" xmlns:a14="http://schemas.microsoft.com/office/drawing/2010/main">
+        <mc:Choice Requires="a14">
           <p:sp>
             <p:nvSpPr>
               <p:cNvPr id="4" name="TextBox 3">
@@ -14625,6 +14626,7 @@
               </a:bodyPr>
               <a:lstStyle/>
               <a:p>
+                <a:pPr/>
                 <a14:m>
                   <m:oMathPara xmlns:m="http://schemas.openxmlformats.org/officeDocument/2006/math">
                     <m:oMathParaPr>
@@ -14766,7 +14768,7 @@
             </p:txBody>
           </p:sp>
         </mc:Choice>
-        <mc:Fallback>
+        <mc:Fallback xmlns="">
           <p:sp>
             <p:nvSpPr>
               <p:cNvPr id="4" name="TextBox 3">
